--- a/course/高校实验室安全/课件/006_安全制度与管理体系.pptx
+++ b/course/高校实验室安全/课件/006_安全制度与管理体系.pptx
@@ -531,12 +531,6 @@
               <a:t>方针要简短明确、让所有成员知晓，并由负责人带头践行。在高校，学校层面的实验室安全管理办法、学院和实验室的安全责任书，都体现了这种承诺。</a:t>
             </a:r>
           </a:p>
-          <a:p/>
-          <a:p>
-            <a:r>
-              <a:t>来源：合并了 2 个原知识点，最佳讲解取自 ACS Hazard Communication &amp; Safety 03（详见 来源.tsv）</a:t>
-            </a:r>
-          </a:p>
         </p:txBody>
       </p:sp>
       <p:sp>
@@ -612,12 +606,6 @@
               <a:t>培训、检查、事故和险情、设备使用、样本和试剂领用等都要登记，形成安全档案，归档保存。留痕可查，出了问题才能追溯原因、改进管理。档案保存期限见第 5 课。</a:t>
             </a:r>
           </a:p>
-          <a:p/>
-          <a:p>
-            <a:r>
-              <a:t>来源：合并了 2 个原知识点，最佳讲解取自 BIORISK MANAGEMENT 42（详见 来源.tsv）</a:t>
-            </a:r>
-          </a:p>
         </p:txBody>
       </p:sp>
       <p:sp>
@@ -693,12 +681,6 @@
               <a:t>高校通常在学校层面设有实验室安全工作领导机构，学院设有相应的安全工作小组，部分领域还有专门的委员会（如生物安全委员会，第 6 章讲解）。具体设置以本校规定为准。</a:t>
             </a:r>
           </a:p>
-          <a:p/>
-          <a:p>
-            <a:r>
-              <a:t>来源：合并了 2 个原知识点，最佳讲解取自 ACS Hazard Communication &amp; Safety 03（详见 来源.tsv）</a:t>
-            </a:r>
-          </a:p>
         </p:txBody>
       </p:sp>
       <p:sp>
@@ -774,12 +756,6 @@
               <a:t>只看滞后指标，往往要等出了事才发现问题；多关注领先指标，可以在事故之前发现薄弱环节。注意，险情报告数增加通常是好现象，说明大家愿意报告。</a:t>
             </a:r>
           </a:p>
-          <a:p/>
-          <a:p>
-            <a:r>
-              <a:t>来源：合并了 2 个原知识点，最佳讲解取自 ACS Hazard Communication &amp; Safety 01（详见 来源.tsv）</a:t>
-            </a:r>
-          </a:p>
         </p:txBody>
       </p:sp>
       <p:sp>
@@ -855,12 +831,6 @@
               <a:t>落到实验室，这一思想可以概括为三点：以可靠的风险评估为基础；采用安全的方法和合适的设备；不断寻找更安全的做法，持续改进。高校实验室不一定都进行体系认证，但这种管理思路同样适用。</a:t>
             </a:r>
           </a:p>
-          <a:p/>
-          <a:p>
-            <a:r>
-              <a:t>来源：合并了 3 个原知识点，最佳讲解取自 Laboratory Ergonomics &amp; RSI 01（详见 来源.tsv）</a:t>
-            </a:r>
-          </a:p>
         </p:txBody>
       </p:sp>
       <p:sp>
@@ -936,12 +906,6 @@
               <a:t>实验室的环境因素包括危险废物和废液、废气排放、废水、能源和水的消耗等。用环境管理的思路管理实验室，有助于依法处置危险废物、减少排放和能耗。绿色实验室与节能环保在第 55 课讲解。</a:t>
             </a:r>
           </a:p>
-          <a:p/>
-          <a:p>
-            <a:r>
-              <a:t>来源：合并了 2 个原知识点，最佳讲解取自 Laboratory Ergonomics &amp; RSI 01（详见 来源.tsv）</a:t>
-            </a:r>
-          </a:p>
         </p:txBody>
       </p:sp>
       <p:sp>
@@ -1017,12 +981,6 @@
               <a:t>《高等学校实验室安全规范》对仪器设备安全管理有相应要求（以现行文本为准）；特种设备还须遵守《中华人民共和国特种设备安全法》。</a:t>
             </a:r>
           </a:p>
-          <a:p/>
-          <a:p>
-            <a:r>
-              <a:t>来源：补充知识点（依据《高等学校实验室安全规范》和本课程大纲范围，原视频未涉及）</a:t>
-            </a:r>
-          </a:p>
         </p:txBody>
       </p:sp>
       <p:sp>
@@ -1318,12 +1276,6 @@
               <a:t>计划的落实需要负责人的管理：向成员讲清本室的特殊危险，监督防护措施的落实；应急预案和安全信息张贴在显眼处；需要定期检测的设备（如通风柜、压力容器、气瓶）按时检测；实验室保存化学品清单，化学品安全技术说明书（SDS）随时可查；风险评估、采取的措施和效果都要记录下来。</a:t>
             </a:r>
           </a:p>
-          <a:p/>
-          <a:p>
-            <a:r>
-              <a:t>来源：合并了 3 个原知识点，最佳讲解取自 ACS Hazard Communication &amp; Safety 01（详见 来源.tsv）</a:t>
-            </a:r>
-          </a:p>
         </p:txBody>
       </p:sp>
       <p:sp>
@@ -1399,12 +1351,6 @@
               <a:t>手册是本实验室安全工作的总纲，进入实验室的每个人都要学习并遵守。具体内容以本实验室现行手册为准。</a:t>
             </a:r>
           </a:p>
-          <a:p/>
-          <a:p>
-            <a:r>
-              <a:t>来源：合并了 3 个原知识点，最佳讲解取自 Acids, Bases &amp; Solvents Safety 11（详见 来源.tsv）</a:t>
-            </a:r>
-          </a:p>
         </p:txBody>
       </p:sp>
       <p:sp>
@@ -1480,12 +1426,6 @@
               <a:t>其他常见的专项制度还有危险化学品采购与储存、气瓶管理、生物安全、辐射安全、仪器设备使用等。</a:t>
             </a:r>
           </a:p>
-          <a:p/>
-          <a:p>
-            <a:r>
-              <a:t>来源：合并了 2 个原知识点，最佳讲解取自 Fire Safety &amp; Extinguisher Training 09（详见 来源.tsv）</a:t>
-            </a:r>
-          </a:p>
         </p:txBody>
       </p:sp>
       <p:sp>
@@ -1561,12 +1501,6 @@
               <a:t>本室规程应由熟悉工作的人员编写，经实验室负责人审核批准后执行，并对成员进行培训。SOP 的编写方法在第 19 课讲解。</a:t>
             </a:r>
           </a:p>
-          <a:p/>
-          <a:p>
-            <a:r>
-              <a:t>来源：合并了 1 个原知识点，最佳讲解取自 Acids, Bases &amp; Solvents Safety 12（详见 来源.tsv）</a:t>
-            </a:r>
-          </a:p>
         </p:txBody>
       </p:sp>
       <p:sp>
@@ -1642,12 +1576,6 @@
               <a:t>应急处置流程和应急电话（119、120、实验室负责人、学院、保卫处）应张贴在实验室显眼处。预案要定期组织演练，演练后总结问题、修订预案。各类事故的具体处置方法在第 14 章讲解。</a:t>
             </a:r>
           </a:p>
-          <a:p/>
-          <a:p>
-            <a:r>
-              <a:t>来源：补充知识点（依据《中华人民共和国安全生产法》和《高等学校实验室安全规范》，原视频未涉及）</a:t>
-            </a:r>
-          </a:p>
         </p:txBody>
       </p:sp>
       <p:sp>
@@ -1728,12 +1656,6 @@
               <a:t>手册是实验室与每位成员之间的约定，既要制定，更要执行。</a:t>
             </a:r>
           </a:p>
-          <a:p/>
-          <a:p>
-            <a:r>
-              <a:t>来源：合并了 4 个原知识点，最佳讲解取自 Acids, Bases &amp; Solvents Safety 11（详见 来源.tsv）</a:t>
-            </a:r>
-          </a:p>
         </p:txBody>
       </p:sp>
       <p:sp>
@@ -1814,12 +1736,6 @@
               <a:t>这些教训说明：制度的价值在于执行。高危操作前必须确认防护到位（如阻燃服、面屏）、确认操作者经过培训且具备能力、安排他人在场；放大实验必须重新评估（第 19 课讲解）。</a:t>
             </a:r>
           </a:p>
-          <a:p/>
-          <a:p>
-            <a:r>
-              <a:t>来源：合并了 2 个原知识点，最佳讲解取自 Acids, Bases &amp; Solvents Safety 12（详见 来源.tsv）</a:t>
-            </a:r>
-          </a:p>
         </p:txBody>
       </p:sp>
       <p:sp>
@@ -1893,12 +1809,6 @@
           <a:p>
             <a:r>
               <a:t>避开这些陷阱，制度才能真正起作用：手册日常使用，安全员真在岗、真管事、有实权，安全与质量一体管理，险情如实报告并整改。</a:t>
-            </a:r>
-          </a:p>
-          <a:p/>
-          <a:p>
-            <a:r>
-              <a:t>来源：合并了 1 个原知识点，最佳讲解取自 Acids, Bases &amp; Solvents Safety 12（详见 来源.tsv）</a:t>
             </a:r>
           </a:p>
         </p:txBody>
